--- a/LS/Final/SDG goals.pptx
+++ b/LS/Final/SDG goals.pptx
@@ -4306,7 +4306,7 @@
         </p:blipFill>
         <p:spPr>
           <a:xfrm>
-            <a:off x="0" y="854964"/>
+            <a:off x="0" y="0"/>
             <a:ext cx="9144000" cy="6858000"/>
           </a:xfrm>
           <a:prstGeom prst="rect">
@@ -4355,7 +4355,7 @@
         </p:blipFill>
         <p:spPr>
           <a:xfrm>
-            <a:off x="0" y="854964"/>
+            <a:off x="0" y="0"/>
             <a:ext cx="9144000" cy="6858000"/>
           </a:xfrm>
           <a:prstGeom prst="rect">
